--- a/20260423_KPS_GUI.pptx
+++ b/20260423_KPS_GUI.pptx
@@ -277,7 +277,7 @@
           <a:p>
             <a:fld id="{916B85E3-3F26-4931-9378-98579BCCDB13}" type="datetimeFigureOut">
               <a:rPr lang="ko-KR" altLang="en-US" smtClean="0"/>
-              <a:t>2026-04-21</a:t>
+              <a:t>2026-04-22</a:t>
             </a:fld>
             <a:endParaRPr lang="ko-KR" altLang="en-US"/>
           </a:p>
@@ -475,7 +475,7 @@
           <a:p>
             <a:fld id="{916B85E3-3F26-4931-9378-98579BCCDB13}" type="datetimeFigureOut">
               <a:rPr lang="ko-KR" altLang="en-US" smtClean="0"/>
-              <a:t>2026-04-21</a:t>
+              <a:t>2026-04-22</a:t>
             </a:fld>
             <a:endParaRPr lang="ko-KR" altLang="en-US"/>
           </a:p>
@@ -683,7 +683,7 @@
           <a:p>
             <a:fld id="{916B85E3-3F26-4931-9378-98579BCCDB13}" type="datetimeFigureOut">
               <a:rPr lang="ko-KR" altLang="en-US" smtClean="0"/>
-              <a:t>2026-04-21</a:t>
+              <a:t>2026-04-22</a:t>
             </a:fld>
             <a:endParaRPr lang="ko-KR" altLang="en-US"/>
           </a:p>
@@ -881,7 +881,7 @@
           <a:p>
             <a:fld id="{916B85E3-3F26-4931-9378-98579BCCDB13}" type="datetimeFigureOut">
               <a:rPr lang="ko-KR" altLang="en-US" smtClean="0"/>
-              <a:t>2026-04-21</a:t>
+              <a:t>2026-04-22</a:t>
             </a:fld>
             <a:endParaRPr lang="ko-KR" altLang="en-US"/>
           </a:p>
@@ -1156,7 +1156,7 @@
           <a:p>
             <a:fld id="{916B85E3-3F26-4931-9378-98579BCCDB13}" type="datetimeFigureOut">
               <a:rPr lang="ko-KR" altLang="en-US" smtClean="0"/>
-              <a:t>2026-04-21</a:t>
+              <a:t>2026-04-22</a:t>
             </a:fld>
             <a:endParaRPr lang="ko-KR" altLang="en-US"/>
           </a:p>
@@ -1421,7 +1421,7 @@
           <a:p>
             <a:fld id="{916B85E3-3F26-4931-9378-98579BCCDB13}" type="datetimeFigureOut">
               <a:rPr lang="ko-KR" altLang="en-US" smtClean="0"/>
-              <a:t>2026-04-21</a:t>
+              <a:t>2026-04-22</a:t>
             </a:fld>
             <a:endParaRPr lang="ko-KR" altLang="en-US"/>
           </a:p>
@@ -1833,7 +1833,7 @@
           <a:p>
             <a:fld id="{916B85E3-3F26-4931-9378-98579BCCDB13}" type="datetimeFigureOut">
               <a:rPr lang="ko-KR" altLang="en-US" smtClean="0"/>
-              <a:t>2026-04-21</a:t>
+              <a:t>2026-04-22</a:t>
             </a:fld>
             <a:endParaRPr lang="ko-KR" altLang="en-US"/>
           </a:p>
@@ -1974,7 +1974,7 @@
           <a:p>
             <a:fld id="{916B85E3-3F26-4931-9378-98579BCCDB13}" type="datetimeFigureOut">
               <a:rPr lang="ko-KR" altLang="en-US" smtClean="0"/>
-              <a:t>2026-04-21</a:t>
+              <a:t>2026-04-22</a:t>
             </a:fld>
             <a:endParaRPr lang="ko-KR" altLang="en-US"/>
           </a:p>
@@ -2087,7 +2087,7 @@
           <a:p>
             <a:fld id="{916B85E3-3F26-4931-9378-98579BCCDB13}" type="datetimeFigureOut">
               <a:rPr lang="ko-KR" altLang="en-US" smtClean="0"/>
-              <a:t>2026-04-21</a:t>
+              <a:t>2026-04-22</a:t>
             </a:fld>
             <a:endParaRPr lang="ko-KR" altLang="en-US"/>
           </a:p>
@@ -2398,7 +2398,7 @@
           <a:p>
             <a:fld id="{916B85E3-3F26-4931-9378-98579BCCDB13}" type="datetimeFigureOut">
               <a:rPr lang="ko-KR" altLang="en-US" smtClean="0"/>
-              <a:t>2026-04-21</a:t>
+              <a:t>2026-04-22</a:t>
             </a:fld>
             <a:endParaRPr lang="ko-KR" altLang="en-US"/>
           </a:p>
@@ -2686,7 +2686,7 @@
           <a:p>
             <a:fld id="{916B85E3-3F26-4931-9378-98579BCCDB13}" type="datetimeFigureOut">
               <a:rPr lang="ko-KR" altLang="en-US" smtClean="0"/>
-              <a:t>2026-04-21</a:t>
+              <a:t>2026-04-22</a:t>
             </a:fld>
             <a:endParaRPr lang="ko-KR" altLang="en-US"/>
           </a:p>
@@ -2927,7 +2927,7 @@
           <a:p>
             <a:fld id="{916B85E3-3F26-4931-9378-98579BCCDB13}" type="datetimeFigureOut">
               <a:rPr lang="ko-KR" altLang="en-US" smtClean="0"/>
-              <a:t>2026-04-21</a:t>
+              <a:t>2026-04-22</a:t>
             </a:fld>
             <a:endParaRPr lang="ko-KR" altLang="en-US"/>
           </a:p>
@@ -7464,6 +7464,16 @@
               <a:buChar char="•"/>
             </a:pPr>
             <a:r>
+              <a:rPr lang="en-US" altLang="ko-KR" sz="2400" dirty="0" err="1">
+                <a:solidFill>
+                  <a:srgbClr val="292934"/>
+                </a:solidFill>
+                <a:latin typeface="Arial"/>
+                <a:ea typeface="돋움" panose="020B0600000101010101" pitchFamily="50" charset="-127"/>
+              </a:rPr>
+              <a:t>Presentated</a:t>
+            </a:r>
+            <a:r>
               <a:rPr lang="en-US" altLang="ko-KR" sz="2400" dirty="0">
                 <a:solidFill>
                   <a:srgbClr val="292934"/>
@@ -7471,7 +7481,7 @@
                 <a:latin typeface="Arial"/>
                 <a:ea typeface="돋움" panose="020B0600000101010101" pitchFamily="50" charset="-127"/>
               </a:rPr>
-              <a:t>Presentation at KPS Fall meeting, 2020</a:t>
+              <a:t> at KPS</a:t>
             </a:r>
           </a:p>
           <a:p>
@@ -7516,8 +7526,27 @@
                 <a:ea typeface="돋움" panose="020B0600000101010101" pitchFamily="50" charset="-127"/>
                 <a:sym typeface="Wingdings" panose="05000000000000000000" pitchFamily="2" charset="2"/>
               </a:rPr>
-              <a:t>Motivation of presentation? </a:t>
-            </a:r>
+              <a:t>Motivation </a:t>
+            </a:r>
+            <a:r>
+              <a:rPr lang="en-US" altLang="ko-KR" sz="2400">
+                <a:solidFill>
+                  <a:srgbClr val="292934"/>
+                </a:solidFill>
+                <a:latin typeface="Arial"/>
+                <a:ea typeface="돋움" panose="020B0600000101010101" pitchFamily="50" charset="-127"/>
+                <a:sym typeface="Wingdings" panose="05000000000000000000" pitchFamily="2" charset="2"/>
+              </a:rPr>
+              <a:t>of presentation again? </a:t>
+            </a:r>
+            <a:endParaRPr lang="en-US" altLang="ko-KR" sz="2400" dirty="0">
+              <a:solidFill>
+                <a:srgbClr val="292934"/>
+              </a:solidFill>
+              <a:latin typeface="Arial"/>
+              <a:ea typeface="돋움" panose="020B0600000101010101" pitchFamily="50" charset="-127"/>
+              <a:sym typeface="Wingdings" panose="05000000000000000000" pitchFamily="2" charset="2"/>
+            </a:endParaRPr>
           </a:p>
           <a:p>
             <a:pPr marL="640080" lvl="1" indent="-182880" latinLnBrk="0">
